--- a/AML_GNN_Presentation_v2.pptx
+++ b/AML_GNN_Presentation_v2.pptx
@@ -3073,45 +3073,6 @@
       </p:sp>
       <p:sp>
         <p:nvSpPr>
-          <p:cNvPr id="10" name="Text 8"/>
-          <p:cNvSpPr/>
-          <p:nvPr/>
-        </p:nvSpPr>
-        <p:spPr>
-          <a:xfrm>
-            <a:off x="484631" y="2192747"/>
-            <a:ext cx="8229600" cy="182880"/>
-          </a:xfrm>
-          <a:prstGeom prst="rect">
-            <a:avLst/>
-          </a:prstGeom>
-          <a:noFill/>
-          <a:ln/>
-        </p:spPr>
-        <p:txBody>
-          <a:bodyPr wrap="square" rtlCol="0" anchor="ctr"/>
-          <a:lstStyle/>
-          <a:p>
-            <a:pPr marL="0" indent="0">
-              <a:buNone/>
-            </a:pPr>
-            <a:r>
-              <a:rPr lang="en-US" sz="900" i="1" dirty="0">
-                <a:solidFill>
-                  <a:srgbClr val="5E7A90"/>
-                </a:solidFill>
-                <a:latin typeface="Calibri" pitchFamily="34" charset="0"/>
-                <a:ea typeface="Calibri" pitchFamily="34" charset="-122"/>
-                <a:cs typeface="Calibri" pitchFamily="34" charset="-120"/>
-              </a:rPr>
-              <a:t>[e_uv = projected edge feature  ·  MLP: 64→128→64  ·  Injective aggregation = maximally expressive (1-WL)]</a:t>
-            </a:r>
-            <a:endParaRPr lang="en-US" sz="900" dirty="0"/>
-          </a:p>
-        </p:txBody>
-      </p:sp>
-      <p:sp>
-        <p:nvSpPr>
           <p:cNvPr id="12" name="Shape 10"/>
           <p:cNvSpPr/>
           <p:nvPr/>
@@ -3363,7 +3324,7 @@
         </p:blipFill>
         <p:spPr>
           <a:xfrm>
-            <a:off x="2936947" y="1574158"/>
+            <a:off x="2936947" y="1654183"/>
             <a:ext cx="2465223" cy="575219"/>
           </a:xfrm>
           <a:prstGeom prst="rect">
@@ -3862,7 +3823,7 @@
         </p:nvSpPr>
         <p:spPr>
           <a:xfrm>
-            <a:off x="320040" y="2478024"/>
+            <a:off x="320040" y="2465498"/>
             <a:ext cx="8503920" cy="1124712"/>
           </a:xfrm>
           <a:prstGeom prst="rect">
@@ -7426,7 +7387,7 @@
                 <a:ea typeface="Calibri" pitchFamily="34" charset="-122"/>
                 <a:cs typeface="Calibri" pitchFamily="34" charset="-120"/>
               </a:rPr>
-              <a:t>Transition matrix: Â = D⁻¹A (column-stochastic)</a:t>
+              <a:t>Transition matrix: Â = D⁻¹A </a:t>
             </a:r>
             <a:endParaRPr lang="en-US" sz="1100" dirty="0"/>
           </a:p>
@@ -16589,7 +16550,7 @@
                 <a:ea typeface="Calibri" pitchFamily="34" charset="-122"/>
                 <a:cs typeface="Calibri" pitchFamily="34" charset="-120"/>
               </a:rPr>
-              <a:t> 0.0515% of transactions are illicit (1,941:1 ratio)</a:t>
+              <a:t> 0.05% of transactions are illicit (1,941:1 ratio)</a:t>
             </a:r>
             <a:endParaRPr lang="en-US" sz="1300" dirty="0"/>
           </a:p>
@@ -19536,7 +19497,29 @@
                 <a:ea typeface="Calibri" pitchFamily="34" charset="-122"/>
                 <a:cs typeface="Calibri" pitchFamily="34" charset="-120"/>
               </a:rPr>
-              <a:t>Xu et al. (2019): any MPNN is at most as powerful as 1-WL</a:t>
+              <a:t>Xu et al. </a:t>
+            </a:r>
+            <a:r>
+              <a:rPr lang="en-US" sz="1300" b="1" dirty="0">
+                <a:solidFill>
+                  <a:srgbClr val="0D2137"/>
+                </a:solidFill>
+                <a:latin typeface="Calibri" pitchFamily="34" charset="0"/>
+                <a:ea typeface="Calibri" pitchFamily="34" charset="-122"/>
+                <a:cs typeface="Calibri" pitchFamily="34" charset="-120"/>
+              </a:rPr>
+              <a:t>HOW POWERFUL ARE GRAPH NEURAL NETWORKS? </a:t>
+            </a:r>
+            <a:r>
+              <a:rPr lang="en-US" sz="1300" dirty="0">
+                <a:solidFill>
+                  <a:srgbClr val="0D2137"/>
+                </a:solidFill>
+                <a:latin typeface="Calibri" pitchFamily="34" charset="0"/>
+                <a:ea typeface="Calibri" pitchFamily="34" charset="-122"/>
+                <a:cs typeface="Calibri" pitchFamily="34" charset="-120"/>
+              </a:rPr>
+              <a:t>(2019): any MPNN is at most as powerful as 1-WL</a:t>
             </a:r>
             <a:endParaRPr lang="en-US" sz="1300" dirty="0"/>
           </a:p>
